--- a/system-design-101/vi/lessons/sd-13-017/slides/sd-13-017.pptx
+++ b/system-design-101/vi/lessons/sd-13-017/slides/sd-13-017.pptx
@@ -1798,7 +1798,7 @@
         <p:spPr>
           <a:xfrm>
             <a:off x="914400" y="1333500"/>
-            <a:ext cx="14287500" cy="2476500"/>
+            <a:ext cx="16459200" cy="2667000"/>
           </a:xfrm>
           <a:prstGeom prst="rect">
             <a:avLst/>
@@ -1807,17 +1807,17 @@
           <a:ln/>
         </p:spPr>
         <p:txBody>
-          <a:bodyPr wrap="square" lIns="0" tIns="57150" rIns="0" bIns="-57150" rtlCol="0" anchor="t"/>
+          <a:bodyPr wrap="square" lIns="0" tIns="61722" rIns="0" bIns="-61722" rtlCol="0" anchor="t"/>
           <a:lstStyle/>
           <a:p>
             <a:pPr algn="l" indent="0" marL="0">
               <a:lnSpc>
-                <a:spcPts val="8100"/>
+                <a:spcPts val="8748"/>
               </a:lnSpc>
               <a:buNone/>
             </a:pPr>
             <a:r>
-              <a:rPr lang="en-US" sz="7500" dirty="0" spc="5" kern="0">
+              <a:rPr lang="en-US" sz="8100" dirty="0" spc="5" kern="0">
                 <a:solidFill>
                   <a:srgbClr val="F3EEE3"/>
                 </a:solidFill>
@@ -1828,7 +1828,7 @@
               <a:t>Deployment</a:t>
             </a:r>
             <a:r>
-              <a:rPr lang="en-US" sz="7500" dirty="0" spc="0" kern="0">
+              <a:rPr lang="en-US" sz="8100" dirty="0" spc="-1" kern="0">
                 <a:solidFill>
                   <a:srgbClr val="F3EEE3"/>
                 </a:solidFill>
@@ -1839,7 +1839,7 @@
               <a:t> của</a:t>
             </a:r>
             <a:r>
-              <a:rPr lang="en-US" sz="7500" dirty="0" spc="-27" kern="0">
+              <a:rPr lang="en-US" sz="8100" dirty="0" spc="-29" kern="0">
                 <a:solidFill>
                   <a:srgbClr val="F3EEE3"/>
                 </a:solidFill>
@@ -1850,7 +1850,7 @@
               <a:t> Kubernetes</a:t>
             </a:r>
             <a:r>
-              <a:rPr lang="en-US" sz="7500" dirty="0" spc="1" kern="0">
+              <a:rPr lang="en-US" sz="8100" dirty="0" spc="2" kern="0">
                 <a:solidFill>
                   <a:srgbClr val="F3EEE3"/>
                 </a:solidFill>
@@ -1861,7 +1861,7 @@
               <a:t> thay</a:t>
             </a:r>
             <a:r>
-              <a:rPr lang="en-US" sz="7500" dirty="0" spc="-11" kern="0">
+              <a:rPr lang="en-US" sz="8100" dirty="0" spc="-10" kern="0">
                 <a:solidFill>
                   <a:srgbClr val="F3EEE3"/>
                 </a:solidFill>
@@ -1872,7 +1872,7 @@
               <a:t> Pod</a:t>
             </a:r>
             <a:r>
-              <a:rPr lang="en-US" sz="7500" dirty="0" spc="0" kern="0">
+              <a:rPr lang="en-US" sz="8100" dirty="0" spc="0" kern="0">
                 <a:solidFill>
                   <a:srgbClr val="F3EEE3"/>
                 </a:solidFill>
@@ -1883,7 +1883,7 @@
               <a:t> như thế</a:t>
             </a:r>
             <a:r>
-              <a:rPr lang="en-US" sz="7500" dirty="0" spc="1" kern="0">
+              <a:rPr lang="en-US" sz="8100" dirty="0" spc="2" kern="0">
                 <a:solidFill>
                   <a:srgbClr val="F3EEE3"/>
                 </a:solidFill>
@@ -1893,7 +1893,7 @@
               </a:rPr>
               <a:t> nào</a:t>
             </a:r>
-            <a:endParaRPr lang="en-US" sz="7500" dirty="0"/>
+            <a:endParaRPr lang="en-US" sz="8100" dirty="0"/>
           </a:p>
         </p:txBody>
       </p:sp>
@@ -2600,101 +2600,7 @@
       </p:sp>
       <p:sp>
         <p:nvSpPr>
-          <p:cNvPr id="17" name="Text 15"/>
-          <p:cNvSpPr/>
-          <p:nvPr/>
-        </p:nvSpPr>
-        <p:spPr>
-          <a:xfrm>
-            <a:off x="914400" y="9525000"/>
-            <a:ext cx="8572500" cy="342900"/>
-          </a:xfrm>
-          <a:prstGeom prst="rect">
-            <a:avLst/>
-          </a:prstGeom>
-          <a:noFill/>
-          <a:ln/>
-        </p:spPr>
-        <p:txBody>
-          <a:bodyPr wrap="square" lIns="0" tIns="0" rIns="0" bIns="0" rtlCol="0" anchor="t"/>
-          <a:lstStyle/>
-          <a:p>
-            <a:pPr algn="l" indent="0" marL="0">
-              <a:buNone/>
-            </a:pPr>
-            <a:r>
-              <a:rPr lang="en-US" sz="1800" dirty="0" spc="-13" kern="0">
-                <a:solidFill>
-                  <a:srgbClr val="9AA0B5"/>
-                </a:solidFill>
-                <a:latin typeface="Be Vietnam Pro" pitchFamily="34" charset="0"/>
-                <a:ea typeface="Be Vietnam Pro" pitchFamily="34" charset="-122"/>
-                <a:cs typeface="Be Vietnam Pro" pitchFamily="34" charset="-120"/>
-              </a:rPr>
-              <a:t>System</a:t>
-            </a:r>
-            <a:r>
-              <a:rPr lang="en-US" sz="1800" dirty="0" spc="-1" kern="0">
-                <a:solidFill>
-                  <a:srgbClr val="9AA0B5"/>
-                </a:solidFill>
-                <a:latin typeface="Be Vietnam Pro" pitchFamily="34" charset="0"/>
-                <a:ea typeface="Be Vietnam Pro" pitchFamily="34" charset="-122"/>
-                <a:cs typeface="Be Vietnam Pro" pitchFamily="34" charset="-120"/>
-              </a:rPr>
-              <a:t> Design</a:t>
-            </a:r>
-            <a:r>
-              <a:rPr lang="en-US" sz="1800" dirty="0" spc="4" kern="0">
-                <a:solidFill>
-                  <a:srgbClr val="9AA0B5"/>
-                </a:solidFill>
-                <a:latin typeface="Be Vietnam Pro" pitchFamily="34" charset="0"/>
-                <a:ea typeface="Be Vietnam Pro" pitchFamily="34" charset="-122"/>
-                <a:cs typeface="Be Vietnam Pro" pitchFamily="34" charset="-120"/>
-              </a:rPr>
-              <a:t> 101</a:t>
-            </a:r>
-            <a:r>
-              <a:rPr lang="en-US" sz="1800" dirty="0" spc="-2" kern="0">
-                <a:solidFill>
-                  <a:srgbClr val="9AA0B5"/>
-                </a:solidFill>
-                <a:latin typeface="Be Vietnam Pro" pitchFamily="34" charset="0"/>
-                <a:ea typeface="Be Vietnam Pro" pitchFamily="34" charset="-122"/>
-                <a:cs typeface="Be Vietnam Pro" pitchFamily="34" charset="-120"/>
-              </a:rPr>
-              <a:t> ·</a:t>
-            </a:r>
-            <a:r>
-              <a:rPr lang="en-US" sz="1800" dirty="0" spc="1" kern="0">
-                <a:solidFill>
-                  <a:srgbClr val="9AA0B5"/>
-                </a:solidFill>
-                <a:latin typeface="Be Vietnam Pro" pitchFamily="34" charset="0"/>
-                <a:ea typeface="Be Vietnam Pro" pitchFamily="34" charset="-122"/>
-                <a:cs typeface="Be Vietnam Pro" pitchFamily="34" charset="-120"/>
-              </a:rPr>
-              <a:t> Bài</a:t>
-            </a:r>
-            <a:r>
-              <a:rPr lang="en-US" sz="1800" dirty="0" spc="0" kern="0">
-                <a:solidFill>
-                  <a:srgbClr val="9AA0B5"/>
-                </a:solidFill>
-                <a:latin typeface="Be Vietnam Pro" pitchFamily="34" charset="0"/>
-                <a:ea typeface="Be Vietnam Pro" pitchFamily="34" charset="-122"/>
-                <a:cs typeface="Be Vietnam Pro" pitchFamily="34" charset="-120"/>
-              </a:rPr>
-              <a:t> 17</a:t>
-            </a:r>
-            <a:endParaRPr lang="en-US" sz="1800" dirty="0"/>
-          </a:p>
-        </p:txBody>
-      </p:sp>
-      <p:sp>
-        <p:nvSpPr>
-          <p:cNvPr id="18" name="Shape 16"/>
+          <p:cNvPr id="17" name="Shape 15"/>
           <p:cNvSpPr/>
           <p:nvPr/>
         </p:nvSpPr>
@@ -2718,7 +2624,7 @@
       </p:sp>
       <p:pic>
         <p:nvPicPr>
-          <p:cNvPr id="19" name="Moda image moda-export-watermark-8f3f1250-22d8-4e5a-9f97-d99abd0d99cf" descr="">    </p:cNvPr>
+          <p:cNvPr id="18" name="Moda image moda-export-watermark-8f3f1250-22d8-4e5a-9f97-d99abd0d99cf" descr="">    </p:cNvPr>
           <p:cNvPicPr>
             <a:picLocks noChangeAspect="1"/>
           </p:cNvPicPr>

--- a/system-design-101/vi/lessons/sd-13-017/slides/sd-13-017.pptx
+++ b/system-design-101/vi/lessons/sd-13-017/slides/sd-13-017.pptx
@@ -7197,7 +7197,7 @@
               <a:t> hạn</a:t>
             </a:r>
             <a:r>
-              <a:rPr lang="en-US" sz="3300" dirty="0" spc="-2" kern="0">
+              <a:rPr lang="en-US" sz="3300" dirty="0" spc="-3" kern="0">
                 <a:solidFill>
                   <a:srgbClr val="14161C"/>
                 </a:solidFill>
@@ -7205,10 +7205,10 @@
                 <a:ea typeface="Be Vietnam Pro SemiBold" pitchFamily="34" charset="-122"/>
                 <a:cs typeface="Be Vietnam Pro SemiBold" pitchFamily="34" charset="-120"/>
               </a:rPr>
-              <a:t> chỉ</a:t>
-            </a:r>
-            <a:r>
-              <a:rPr lang="en-US" sz="3300" dirty="0" spc="-5" kern="0">
+              <a:t> thì</a:t>
+            </a:r>
+            <a:r>
+              <a:rPr lang="en-US" sz="3300" dirty="0" spc="23" kern="0">
                 <a:solidFill>
                   <a:srgbClr val="14161C"/>
                 </a:solidFill>
@@ -7216,10 +7216,10 @@
                 <a:ea typeface="Be Vietnam Pro SemiBold" pitchFamily="34" charset="-122"/>
                 <a:cs typeface="Be Vietnam Pro SemiBold" pitchFamily="34" charset="-120"/>
               </a:rPr>
-              <a:t> thêm</a:t>
-            </a:r>
-            <a:r>
-              <a:rPr lang="en-US" sz="3300" dirty="0" spc="23" kern="0">
+              <a:t> điều</a:t>
+            </a:r>
+            <a:r>
+              <a:rPr lang="en-US" sz="3300" dirty="0" spc="-2" kern="0">
                 <a:solidFill>
                   <a:srgbClr val="14161C"/>
                 </a:solidFill>
@@ -7227,10 +7227,10 @@
                 <a:ea typeface="Be Vietnam Pro SemiBold" pitchFamily="34" charset="-122"/>
                 <a:cs typeface="Be Vietnam Pro SemiBold" pitchFamily="34" charset="-120"/>
               </a:rPr>
-              <a:t> điều</a:t>
-            </a:r>
-            <a:r>
-              <a:rPr lang="en-US" sz="3300" dirty="0" spc="-2" kern="0">
+              <a:t> kiện</a:t>
+            </a:r>
+            <a:r>
+              <a:rPr lang="en-US" sz="3300" dirty="0" spc="-20" kern="0">
                 <a:solidFill>
                   <a:srgbClr val="14161C"/>
                 </a:solidFill>
@@ -7238,7 +7238,40 @@
                 <a:ea typeface="Be Vietnam Pro SemiBold" pitchFamily="34" charset="-122"/>
                 <a:cs typeface="Be Vietnam Pro SemiBold" pitchFamily="34" charset="-120"/>
               </a:rPr>
-              <a:t> kiện</a:t>
+              <a:t> Progressing</a:t>
+            </a:r>
+            <a:r>
+              <a:rPr lang="en-US" sz="3300" dirty="0" spc="-5" kern="0">
+                <a:solidFill>
+                  <a:srgbClr val="14161C"/>
+                </a:solidFill>
+                <a:latin typeface="Be Vietnam Pro SemiBold" pitchFamily="34" charset="0"/>
+                <a:ea typeface="Be Vietnam Pro SemiBold" pitchFamily="34" charset="-122"/>
+                <a:cs typeface="Be Vietnam Pro SemiBold" pitchFamily="34" charset="-120"/>
+              </a:rPr>
+              <a:t> có</a:t>
+            </a:r>
+            <a:r>
+              <a:rPr lang="en-US" sz="3300" dirty="0" spc="1" kern="0">
+                <a:solidFill>
+                  <a:srgbClr val="14161C"/>
+                </a:solidFill>
+                <a:latin typeface="Be Vietnam Pro SemiBold" pitchFamily="34" charset="0"/>
+                <a:ea typeface="Be Vietnam Pro SemiBold" pitchFamily="34" charset="-122"/>
+                <a:cs typeface="Be Vietnam Pro SemiBold" pitchFamily="34" charset="-120"/>
+              </a:rPr>
+              <a:t> lý</a:t>
+            </a:r>
+            <a:r>
+              <a:rPr lang="en-US" sz="3300" dirty="0" spc="-6" kern="0">
+                <a:solidFill>
+                  <a:srgbClr val="14161C"/>
+                </a:solidFill>
+                <a:latin typeface="Be Vietnam Pro SemiBold" pitchFamily="34" charset="0"/>
+                <a:ea typeface="Be Vietnam Pro SemiBold" pitchFamily="34" charset="-122"/>
+                <a:cs typeface="Be Vietnam Pro SemiBold" pitchFamily="34" charset="-120"/>
+              </a:rPr>
+              <a:t> do</a:t>
             </a:r>
             <a:r>
               <a:rPr lang="en-US" sz="3300" dirty="0" spc="-16" kern="0">

--- a/system-design-101/vi/lessons/sd-13-017/slides/sd-13-017.pptx
+++ b/system-design-101/vi/lessons/sd-13-017/slides/sd-13-017.pptx
@@ -10168,7 +10168,7 @@
         <p:spPr>
           <a:xfrm>
             <a:off x="914400" y="1238250"/>
-            <a:ext cx="16459200" cy="952500"/>
+            <a:ext cx="16459200" cy="1143000"/>
           </a:xfrm>
           <a:prstGeom prst="rect">
             <a:avLst/>
@@ -10177,14 +10177,14 @@
           <a:ln/>
         </p:spPr>
         <p:txBody>
-          <a:bodyPr wrap="square" lIns="0" tIns="0" rIns="0" bIns="0" rtlCol="0" anchor="ctr"/>
+          <a:bodyPr wrap="square" lIns="0" tIns="0" rIns="0" bIns="0" rtlCol="0" anchor="t"/>
           <a:lstStyle/>
           <a:p>
             <a:pPr algn="l" indent="0" marL="0">
               <a:buNone/>
             </a:pPr>
             <a:r>
-              <a:rPr lang="en-US" sz="4500" dirty="0" spc="5" kern="0">
+              <a:rPr lang="en-US" sz="6900" dirty="0" spc="-1" kern="0">
                 <a:solidFill>
                   <a:srgbClr val="F3EEE3"/>
                 </a:solidFill>
@@ -10195,7 +10195,7 @@
               <a:t>3</a:t>
             </a:r>
             <a:r>
-              <a:rPr lang="en-US" sz="4500" dirty="0" spc="-4" kern="0">
+              <a:rPr lang="en-US" sz="6900" dirty="0" spc="-10" kern="0">
                 <a:solidFill>
                   <a:srgbClr val="F3EEE3"/>
                 </a:solidFill>
@@ -10206,7 +10206,7 @@
               <a:t> Pod,</a:t>
             </a:r>
             <a:r>
-              <a:rPr lang="en-US" sz="4500" dirty="0" spc="-17" kern="0">
+              <a:rPr lang="en-US" sz="6900" dirty="0" spc="-26" kern="0">
                 <a:solidFill>
                   <a:srgbClr val="F3EEE3"/>
                 </a:solidFill>
@@ -10217,7 +10217,7 @@
               <a:t> maxSurge:</a:t>
             </a:r>
             <a:r>
-              <a:rPr lang="en-US" sz="4500" dirty="0" spc="1" kern="0">
+              <a:rPr lang="en-US" sz="6900" dirty="0" spc="0" kern="0">
                 <a:solidFill>
                   <a:srgbClr val="F3EEE3"/>
                 </a:solidFill>
@@ -10228,7 +10228,7 @@
               <a:t> 1,</a:t>
             </a:r>
             <a:r>
-              <a:rPr lang="en-US" sz="4500" dirty="0" spc="-17" kern="0">
+              <a:rPr lang="en-US" sz="6900" dirty="0" spc="-30" kern="0">
                 <a:solidFill>
                   <a:srgbClr val="F3EEE3"/>
                 </a:solidFill>
@@ -10239,7 +10239,7 @@
               <a:t> maxUnavailable:</a:t>
             </a:r>
             <a:r>
-              <a:rPr lang="en-US" sz="4500" dirty="0" spc="1" kern="0">
+              <a:rPr lang="en-US" sz="6900" dirty="0" spc="-3" kern="0">
                 <a:solidFill>
                   <a:srgbClr val="F3EEE3"/>
                 </a:solidFill>
@@ -10249,7 +10249,7 @@
               </a:rPr>
               <a:t> 0</a:t>
             </a:r>
-            <a:endParaRPr lang="en-US" sz="4500" dirty="0"/>
+            <a:endParaRPr lang="en-US" sz="6900" dirty="0"/>
           </a:p>
         </p:txBody>
       </p:sp>
@@ -10261,7 +10261,7 @@
         </p:nvSpPr>
         <p:spPr>
           <a:xfrm>
-            <a:off x="914400" y="2190750"/>
+            <a:off x="914400" y="2476500"/>
             <a:ext cx="16459200" cy="533400"/>
           </a:xfrm>
           <a:prstGeom prst="rect">
@@ -11182,7 +11182,7 @@
               <a:buNone/>
             </a:pPr>
             <a:r>
-              <a:rPr lang="en-US" sz="6600" dirty="0" spc="-1" kern="0">
+              <a:rPr lang="en-US" sz="6900" dirty="0" spc="1" kern="0">
                 <a:solidFill>
                   <a:srgbClr val="14161C"/>
                 </a:solidFill>
@@ -11193,7 +11193,7 @@
               <a:t>Sáu</a:t>
             </a:r>
             <a:r>
-              <a:rPr lang="en-US" sz="6600" dirty="0" spc="23" kern="0">
+              <a:rPr lang="en-US" sz="6900" dirty="0" spc="28" kern="0">
                 <a:solidFill>
                   <a:srgbClr val="14161C"/>
                 </a:solidFill>
@@ -11204,7 +11204,7 @@
               <a:t> điều</a:t>
             </a:r>
             <a:r>
-              <a:rPr lang="en-US" sz="6600" dirty="0" spc="-2" kern="0">
+              <a:rPr lang="en-US" sz="6900" dirty="0" spc="-2" kern="0">
                 <a:solidFill>
                   <a:srgbClr val="14161C"/>
                 </a:solidFill>
@@ -11215,7 +11215,7 @@
               <a:t> cần</a:t>
             </a:r>
             <a:r>
-              <a:rPr lang="en-US" sz="6600" dirty="0" spc="-1" kern="0">
+              <a:rPr lang="en-US" sz="6900" dirty="0" spc="1" kern="0">
                 <a:solidFill>
                   <a:srgbClr val="14161C"/>
                 </a:solidFill>
@@ -11225,7 +11225,7 @@
               </a:rPr>
               <a:t> nhớ</a:t>
             </a:r>
-            <a:endParaRPr lang="en-US" sz="6600" dirty="0"/>
+            <a:endParaRPr lang="en-US" sz="6900" dirty="0"/>
           </a:p>
         </p:txBody>
       </p:sp>

--- a/system-design-101/vi/lessons/sd-13-017/slides/sd-13-017.pptx
+++ b/system-design-101/vi/lessons/sd-13-017/slides/sd-13-017.pptx
@@ -10444,7 +10444,7 @@
               <a:buNone/>
             </a:pPr>
             <a:r>
-              <a:rPr lang="en-US" sz="3900" dirty="0" spc="-42" kern="0">
+              <a:rPr lang="en-US" sz="3900" dirty="0" spc="-137" kern="0">
                 <a:solidFill>
                   <a:srgbClr val="F3EEE3"/>
                 </a:solidFill>
@@ -10452,10 +10452,10 @@
                 <a:ea typeface="Be Vietnam Pro ExtraBold" pitchFamily="34" charset="-122"/>
                 <a:cs typeface="Be Vietnam Pro ExtraBold" pitchFamily="34" charset="-120"/>
               </a:rPr>
-              <a:t>Pod</a:t>
-            </a:r>
-            <a:r>
-              <a:rPr lang="en-US" sz="3900" dirty="0" spc="-5" kern="0">
+              <a:t>Tối</a:t>
+            </a:r>
+            <a:r>
+              <a:rPr lang="en-US" sz="3900" dirty="0" spc="3" kern="0">
                 <a:solidFill>
                   <a:srgbClr val="F3EEE3"/>
                 </a:solidFill>
@@ -10463,10 +10463,10 @@
                 <a:ea typeface="Be Vietnam Pro ExtraBold" pitchFamily="34" charset="-122"/>
                 <a:cs typeface="Be Vietnam Pro ExtraBold" pitchFamily="34" charset="-120"/>
               </a:rPr>
-              <a:t> tối</a:t>
-            </a:r>
-            <a:r>
-              <a:rPr lang="en-US" sz="3900" dirty="0" spc="3" kern="0">
+              <a:t> đa</a:t>
+            </a:r>
+            <a:r>
+              <a:rPr lang="en-US" sz="3900" dirty="0" spc="-15" kern="0">
                 <a:solidFill>
                   <a:srgbClr val="F3EEE3"/>
                 </a:solidFill>
@@ -10474,10 +10474,10 @@
                 <a:ea typeface="Be Vietnam Pro ExtraBold" pitchFamily="34" charset="-122"/>
                 <a:cs typeface="Be Vietnam Pro ExtraBold" pitchFamily="34" charset="-120"/>
               </a:rPr>
-              <a:t> đa</a:t>
-            </a:r>
-            <a:r>
-              <a:rPr lang="en-US" sz="3900" dirty="0" spc="-15" kern="0">
+              <a:t> không</a:t>
+            </a:r>
+            <a:r>
+              <a:rPr lang="en-US" sz="3900" dirty="0" spc="1" kern="0">
                 <a:solidFill>
                   <a:srgbClr val="F3EEE3"/>
                 </a:solidFill>
@@ -10485,10 +10485,10 @@
                 <a:ea typeface="Be Vietnam Pro ExtraBold" pitchFamily="34" charset="-122"/>
                 <a:cs typeface="Be Vietnam Pro ExtraBold" pitchFamily="34" charset="-120"/>
               </a:rPr>
-              <a:t> không</a:t>
-            </a:r>
-            <a:r>
-              <a:rPr lang="en-US" sz="3900" dirty="0" spc="1" kern="0">
+              <a:t> đang</a:t>
+            </a:r>
+            <a:r>
+              <a:rPr lang="en-US" sz="3900" dirty="0" spc="-9" kern="0">
                 <a:solidFill>
                   <a:srgbClr val="F3EEE3"/>
                 </a:solidFill>
@@ -10496,10 +10496,10 @@
                 <a:ea typeface="Be Vietnam Pro ExtraBold" pitchFamily="34" charset="-122"/>
                 <a:cs typeface="Be Vietnam Pro ExtraBold" pitchFamily="34" charset="-120"/>
               </a:rPr>
-              <a:t> đang</a:t>
-            </a:r>
-            <a:r>
-              <a:rPr lang="en-US" sz="3900" dirty="0" spc="-11" kern="0">
+              <a:t> tắt:</a:t>
+            </a:r>
+            <a:r>
+              <a:rPr lang="en-US" sz="3900" dirty="0" spc="1" kern="0">
                 <a:solidFill>
                   <a:srgbClr val="F3EEE3"/>
                 </a:solidFill>
@@ -10507,7 +10507,51 @@
                 <a:ea typeface="Be Vietnam Pro ExtraBold" pitchFamily="34" charset="-122"/>
                 <a:cs typeface="Be Vietnam Pro ExtraBold" pitchFamily="34" charset="-120"/>
               </a:rPr>
-              <a:t> tắt</a:t>
+              <a:t> 3</a:t>
+            </a:r>
+            <a:r>
+              <a:rPr lang="en-US" sz="3900" dirty="0" spc="-3" kern="0">
+                <a:solidFill>
+                  <a:srgbClr val="F3EEE3"/>
+                </a:solidFill>
+                <a:latin typeface="Be Vietnam Pro ExtraBold" pitchFamily="34" charset="0"/>
+                <a:ea typeface="Be Vietnam Pro ExtraBold" pitchFamily="34" charset="-122"/>
+                <a:cs typeface="Be Vietnam Pro ExtraBold" pitchFamily="34" charset="-120"/>
+              </a:rPr>
+              <a:t> +</a:t>
+            </a:r>
+            <a:r>
+              <a:rPr lang="en-US" sz="3900" dirty="0" spc="-1" kern="0">
+                <a:solidFill>
+                  <a:srgbClr val="F3EEE3"/>
+                </a:solidFill>
+                <a:latin typeface="Be Vietnam Pro ExtraBold" pitchFamily="34" charset="0"/>
+                <a:ea typeface="Be Vietnam Pro ExtraBold" pitchFamily="34" charset="-122"/>
+                <a:cs typeface="Be Vietnam Pro ExtraBold" pitchFamily="34" charset="-120"/>
+              </a:rPr>
+              <a:t> 1</a:t>
+            </a:r>
+            <a:r>
+              <a:rPr lang="en-US" sz="3900" dirty="0" spc="-2" kern="0">
+                <a:solidFill>
+                  <a:srgbClr val="F3EEE3"/>
+                </a:solidFill>
+                <a:latin typeface="Be Vietnam Pro ExtraBold" pitchFamily="34" charset="0"/>
+                <a:ea typeface="Be Vietnam Pro ExtraBold" pitchFamily="34" charset="-122"/>
+                <a:cs typeface="Be Vietnam Pro ExtraBold" pitchFamily="34" charset="-120"/>
+              </a:rPr>
+              <a:t> tạm</a:t>
+            </a:r>
+            <a:r>
+              <a:rPr lang="en-US" sz="3900" dirty="0" spc="1" kern="0">
+                <a:solidFill>
+                  <a:srgbClr val="F3EEE3"/>
+                </a:solidFill>
+                <a:latin typeface="Be Vietnam Pro ExtraBold" pitchFamily="34" charset="0"/>
+                <a:ea typeface="Be Vietnam Pro ExtraBold" pitchFamily="34" charset="-122"/>
+                <a:cs typeface="Be Vietnam Pro ExtraBold" pitchFamily="34" charset="-120"/>
+              </a:rPr>
+              <a:t> thời</a:t>
             </a:r>
             <a:endParaRPr lang="en-US" sz="3900" dirty="0"/>
           </a:p>
@@ -10538,7 +10582,7 @@
               <a:buNone/>
             </a:pPr>
             <a:r>
-              <a:rPr lang="en-US" sz="3000" dirty="0" spc="5" kern="0">
+              <a:rPr lang="en-US" sz="3000" dirty="0" spc="-24" kern="0">
                 <a:solidFill>
                   <a:srgbClr val="E4E1D8"/>
                 </a:solidFill>
@@ -10546,7 +10590,29 @@
                 <a:ea typeface="Be Vietnam Pro" pitchFamily="34" charset="-122"/>
                 <a:cs typeface="Be Vietnam Pro" pitchFamily="34" charset="-120"/>
               </a:rPr>
-              <a:t>3</a:t>
+              <a:t>Pod</a:t>
+            </a:r>
+            <a:r>
+              <a:rPr lang="en-US" sz="3000" dirty="0" spc="12" kern="0">
+                <a:solidFill>
+                  <a:srgbClr val="E4E1D8"/>
+                </a:solidFill>
+                <a:latin typeface="Be Vietnam Pro" pitchFamily="34" charset="0"/>
+                <a:ea typeface="Be Vietnam Pro" pitchFamily="34" charset="-122"/>
+                <a:cs typeface="Be Vietnam Pro" pitchFamily="34" charset="-120"/>
+              </a:rPr>
+              <a:t> đang</a:t>
+            </a:r>
+            <a:r>
+              <a:rPr lang="en-US" sz="3000" dirty="0" spc="-32" kern="0">
+                <a:solidFill>
+                  <a:srgbClr val="E4E1D8"/>
+                </a:solidFill>
+                <a:latin typeface="Be Vietnam Pro" pitchFamily="34" charset="0"/>
+                <a:ea typeface="Be Vietnam Pro" pitchFamily="34" charset="-122"/>
+                <a:cs typeface="Be Vietnam Pro" pitchFamily="34" charset="-120"/>
+              </a:rPr>
+              <a:t> tắt</a:t>
             </a:r>
             <a:r>
               <a:rPr lang="en-US" sz="3000" dirty="0" spc="1" kern="0">
@@ -10557,10 +10623,10 @@
                 <a:ea typeface="Be Vietnam Pro" pitchFamily="34" charset="-122"/>
                 <a:cs typeface="Be Vietnam Pro" pitchFamily="34" charset="-120"/>
               </a:rPr>
-              <a:t> +</a:t>
-            </a:r>
-            <a:r>
-              <a:rPr lang="en-US" sz="3000" dirty="0" spc="3" kern="0">
+              <a:t> không</a:t>
+            </a:r>
+            <a:r>
+              <a:rPr lang="en-US" sz="3000" dirty="0" spc="-1" kern="0">
                 <a:solidFill>
                   <a:srgbClr val="E4E1D8"/>
                 </a:solidFill>
@@ -10568,10 +10634,10 @@
                 <a:ea typeface="Be Vietnam Pro" pitchFamily="34" charset="-122"/>
                 <a:cs typeface="Be Vietnam Pro" pitchFamily="34" charset="-120"/>
               </a:rPr>
-              <a:t> 1</a:t>
-            </a:r>
-            <a:r>
-              <a:rPr lang="en-US" sz="3000" dirty="0" spc="-15" kern="0">
+              <a:t> tính;</a:t>
+            </a:r>
+            <a:r>
+              <a:rPr lang="en-US" sz="3000" dirty="0" spc="-12" kern="0">
                 <a:solidFill>
                   <a:srgbClr val="E4E1D8"/>
                 </a:solidFill>
@@ -10579,7 +10645,40 @@
                 <a:ea typeface="Be Vietnam Pro" pitchFamily="34" charset="-122"/>
                 <a:cs typeface="Be Vietnam Pro" pitchFamily="34" charset="-120"/>
               </a:rPr>
-              <a:t> tạm</a:t>
+              <a:t> tổng</a:t>
+            </a:r>
+            <a:r>
+              <a:rPr lang="en-US" sz="3000" dirty="0" spc="4" kern="0">
+                <a:solidFill>
+                  <a:srgbClr val="E4E1D8"/>
+                </a:solidFill>
+                <a:latin typeface="Be Vietnam Pro" pitchFamily="34" charset="0"/>
+                <a:ea typeface="Be Vietnam Pro" pitchFamily="34" charset="-122"/>
+                <a:cs typeface="Be Vietnam Pro" pitchFamily="34" charset="-120"/>
+              </a:rPr>
+              <a:t> có</a:t>
+            </a:r>
+            <a:r>
+              <a:rPr lang="en-US" sz="3000" dirty="0" spc="0" kern="0">
+                <a:solidFill>
+                  <a:srgbClr val="E4E1D8"/>
+                </a:solidFill>
+                <a:latin typeface="Be Vietnam Pro" pitchFamily="34" charset="0"/>
+                <a:ea typeface="Be Vietnam Pro" pitchFamily="34" charset="-122"/>
+                <a:cs typeface="Be Vietnam Pro" pitchFamily="34" charset="-120"/>
+              </a:rPr>
+              <a:t> thể</a:t>
+            </a:r>
+            <a:r>
+              <a:rPr lang="en-US" sz="3000" dirty="0" spc="-1" kern="0">
+                <a:solidFill>
+                  <a:srgbClr val="E4E1D8"/>
+                </a:solidFill>
+                <a:latin typeface="Be Vietnam Pro" pitchFamily="34" charset="0"/>
+                <a:ea typeface="Be Vietnam Pro" pitchFamily="34" charset="-122"/>
+                <a:cs typeface="Be Vietnam Pro" pitchFamily="34" charset="-120"/>
+              </a:rPr>
+              <a:t> hơn</a:t>
             </a:r>
             <a:r>
               <a:rPr lang="en-US" sz="3000" dirty="0" spc="1" kern="0">
@@ -10590,7 +10689,7 @@
                 <a:ea typeface="Be Vietnam Pro" pitchFamily="34" charset="-122"/>
                 <a:cs typeface="Be Vietnam Pro" pitchFamily="34" charset="-120"/>
               </a:rPr>
-              <a:t> thời.</a:t>
+              <a:t> 4.</a:t>
             </a:r>
             <a:endParaRPr lang="en-US" sz="3000" dirty="0"/>
           </a:p>

--- a/system-design-101/vi/lessons/sd-13-017/slides/sd-13-017.pptx
+++ b/system-design-101/vi/lessons/sd-13-017/slides/sd-13-017.pptx
@@ -4086,7 +4086,7 @@
               <a:buNone/>
             </a:pPr>
             <a:r>
-              <a:rPr lang="en-US" sz="2700" dirty="0" spc="-4" kern="0">
+              <a:rPr lang="en-US" sz="2700" dirty="0" spc="-2" kern="0">
                 <a:solidFill>
                   <a:srgbClr val="14161C"/>
                 </a:solidFill>
@@ -4094,7 +4094,7 @@
                 <a:ea typeface="Be Vietnam Pro SemiBold" pitchFamily="34" charset="-122"/>
                 <a:cs typeface="Be Vietnam Pro SemiBold" pitchFamily="34" charset="-120"/>
               </a:rPr>
-              <a:t>Bốn</a:t>
+              <a:t>Ba</a:t>
             </a:r>
             <a:r>
               <a:rPr lang="en-US" sz="2700" dirty="0" spc="-6" kern="0">
@@ -4141,7 +4141,7 @@
               <a:t> RollingUpdate,</a:t>
             </a:r>
             <a:r>
-              <a:rPr lang="en-US" sz="2700" dirty="0" spc="0" kern="0">
+              <a:rPr lang="en-US" sz="2700" dirty="0" spc="-1" kern="0">
                 <a:solidFill>
                   <a:srgbClr val="14161C"/>
                 </a:solidFill>
@@ -4163,7 +4163,7 @@
               <a:t> định</a:t>
             </a:r>
             <a:r>
-              <a:rPr lang="en-US" sz="2700" dirty="0" spc="-2" kern="0">
+              <a:rPr lang="en-US" sz="2700" dirty="0" spc="-1" kern="0">
                 <a:solidFill>
                   <a:srgbClr val="14161C"/>
                 </a:solidFill>

--- a/system-design-101/vi/lessons/sd-13-017/slides/sd-13-017.pptx
+++ b/system-design-101/vi/lessons/sd-13-017/slides/sd-13-017.pptx
@@ -6209,7 +6209,7 @@
               <a:t>minReadySeconds:</a:t>
             </a:r>
             <a:r>
-              <a:rPr lang="en-US" sz="2550" dirty="0" spc="1" kern="0">
+              <a:rPr lang="en-US" sz="2550" dirty="0" spc="-5" kern="0">
                 <a:solidFill>
                   <a:srgbClr val="3DD6A0"/>
                 </a:solidFill>
@@ -6217,10 +6217,10 @@
                 <a:ea typeface="Be Vietnam Pro ExtraBold" pitchFamily="34" charset="-122"/>
                 <a:cs typeface="Be Vietnam Pro ExtraBold" pitchFamily="34" charset="-120"/>
               </a:rPr>
-              <a:t> giữ</a:t>
-            </a:r>
-            <a:r>
-              <a:rPr lang="en-US" sz="2550" dirty="0" spc="-10" kern="0">
+              <a:t> liên</a:t>
+            </a:r>
+            <a:r>
+              <a:rPr lang="en-US" sz="2550" dirty="0" spc="0" kern="0">
                 <a:solidFill>
                   <a:srgbClr val="3DD6A0"/>
                 </a:solidFill>
@@ -6228,10 +6228,10 @@
                 <a:ea typeface="Be Vietnam Pro ExtraBold" pitchFamily="34" charset="-122"/>
                 <a:cs typeface="Be Vietnam Pro ExtraBold" pitchFamily="34" charset="-120"/>
               </a:rPr>
-              <a:t> thêm</a:t>
-            </a:r>
-            <a:r>
-              <a:rPr lang="en-US" sz="2550" dirty="0" spc="-12" kern="0">
+              <a:t> tục</a:t>
+            </a:r>
+            <a:r>
+              <a:rPr lang="en-US" sz="2550" dirty="0" spc="2" kern="0">
                 <a:solidFill>
                   <a:srgbClr val="3DD6A0"/>
                 </a:solidFill>
@@ -6239,10 +6239,10 @@
                 <a:ea typeface="Be Vietnam Pro ExtraBold" pitchFamily="34" charset="-122"/>
                 <a:cs typeface="Be Vietnam Pro ExtraBold" pitchFamily="34" charset="-120"/>
               </a:rPr>
-              <a:t> vài</a:t>
-            </a:r>
-            <a:r>
-              <a:rPr lang="en-US" sz="2550" dirty="0" spc="-7" kern="0">
+              <a:t> đủ</a:t>
+            </a:r>
+            <a:r>
+              <a:rPr lang="en-US" sz="2550" dirty="0" spc="-2" kern="0">
                 <a:solidFill>
                   <a:srgbClr val="3DD6A0"/>
                 </a:solidFill>
@@ -6250,7 +6250,40 @@
                 <a:ea typeface="Be Vietnam Pro ExtraBold" pitchFamily="34" charset="-122"/>
                 <a:cs typeface="Be Vietnam Pro ExtraBold" pitchFamily="34" charset="-120"/>
               </a:rPr>
+              <a:t> số</a:t>
+            </a:r>
+            <a:r>
+              <a:rPr lang="en-US" sz="2550" dirty="0" spc="-6" kern="0">
+                <a:solidFill>
+                  <a:srgbClr val="3DD6A0"/>
+                </a:solidFill>
+                <a:latin typeface="Be Vietnam Pro ExtraBold" pitchFamily="34" charset="0"/>
+                <a:ea typeface="Be Vietnam Pro ExtraBold" pitchFamily="34" charset="-122"/>
+                <a:cs typeface="Be Vietnam Pro ExtraBold" pitchFamily="34" charset="-120"/>
+              </a:rPr>
               <a:t> giây</a:t>
+            </a:r>
+            <a:r>
+              <a:rPr lang="en-US" sz="2550" dirty="0" spc="3" kern="0">
+                <a:solidFill>
+                  <a:srgbClr val="3DD6A0"/>
+                </a:solidFill>
+                <a:latin typeface="Be Vietnam Pro ExtraBold" pitchFamily="34" charset="0"/>
+                <a:ea typeface="Be Vietnam Pro ExtraBold" pitchFamily="34" charset="-122"/>
+                <a:cs typeface="Be Vietnam Pro ExtraBold" pitchFamily="34" charset="-120"/>
+              </a:rPr>
+              <a:t> đã</a:t>
+            </a:r>
+            <a:r>
+              <a:rPr lang="en-US" sz="2550" dirty="0" spc="1" kern="0">
+                <a:solidFill>
+                  <a:srgbClr val="3DD6A0"/>
+                </a:solidFill>
+                <a:latin typeface="Be Vietnam Pro ExtraBold" pitchFamily="34" charset="0"/>
+                <a:ea typeface="Be Vietnam Pro ExtraBold" pitchFamily="34" charset="-122"/>
+                <a:cs typeface="Be Vietnam Pro ExtraBold" pitchFamily="34" charset="-120"/>
+              </a:rPr>
+              <a:t> đặt</a:t>
             </a:r>
             <a:endParaRPr lang="en-US" sz="2550" dirty="0"/>
           </a:p>
